--- a/docs/presentation/VoiceShield_Jigyasa_UCOPSB.pptx
+++ b/docs/presentation/VoiceShield_Jigyasa_UCOPSB.pptx
@@ -8629,7 +8629,7 @@
                 </a:solidFill>
                 <a:latin typeface="Calibri"/>
               </a:rPr>
-              <a:t>AASIST-L</a:t>
+              <a:t>MMS-300M (NII)</a:t>
             </a:r>
           </a:p>
         </p:txBody>
@@ -8668,7 +8668,7 @@
                 </a:solidFill>
                 <a:latin typeface="Calibri"/>
               </a:rPr>
-              <a:t>raw waveform GNN</a:t>
+              <a:t>multilingual SSL, 74k h + RawBoost</a:t>
             </a:r>
           </a:p>
         </p:txBody>
@@ -8707,7 +8707,7 @@
                 </a:solidFill>
                 <a:latin typeface="Calibri"/>
               </a:rPr>
-              <a:t>spectro-temporal graph artifacts</a:t>
+              <a:t>all families: GAN vocoders, TTS, VC, wild fakes</a:t>
             </a:r>
           </a:p>
         </p:txBody>
@@ -8746,7 +8746,7 @@
                 </a:solidFill>
                 <a:latin typeface="Calibri"/>
               </a:rPr>
-              <a:t>ASVspoof 2019 LA</a:t>
+              <a:t>benchmark AUC 0.997</a:t>
             </a:r>
           </a:p>
         </p:txBody>
@@ -8902,7 +8902,7 @@
                 </a:solidFill>
                 <a:latin typeface="Calibri"/>
               </a:rPr>
-              <a:t>deepfake fine-tune · EER 4%</a:t>
+              <a:t>benchmark AUC 0.73</a:t>
             </a:r>
           </a:p>
         </p:txBody>
@@ -9102,7 +9102,7 @@
                 </a:solidFill>
                 <a:latin typeface="Calibri"/>
               </a:rPr>
-              <a:t>real-world deepfakes</a:t>
+              <a:t>benchmark AUC 0.87</a:t>
             </a:r>
           </a:p>
         </p:txBody>
@@ -9219,7 +9219,7 @@
                 </a:solidFill>
                 <a:latin typeface="Calibri"/>
               </a:rPr>
-              <a:t>phase resets · unnaturally smooth F0</a:t>
+              <a:t>artifact naming for the agent, zero fusion weight</a:t>
             </a:r>
           </a:p>
         </p:txBody>
@@ -9258,7 +9258,7 @@
                 </a:solidFill>
                 <a:latin typeface="Calibri"/>
               </a:rPr>
-              <a:t>no training data needed</a:t>
+              <a:t>explainability layer</a:t>
             </a:r>
           </a:p>
         </p:txBody>
@@ -9297,7 +9297,7 @@
                 </a:solidFill>
                 <a:latin typeface="Calibri"/>
               </a:rPr>
-              <a:t>Proof it matters: a real ElevenLabs clone slipped past our ASVspoof-trained detector (0.19) — and was caught at 0.999 confidence by the In-the-Wild-trained member. Every model has blind spots; the fusion is calibrated so one model's blind spot is another's bullseye.</a:t>
+              <a:t>Selected by measurement, not marketing: we benchmarked 8 candidate detectors on 496 clips spanning 7 GAN vocoders (WaveFake), 100+ TTS/VC systems (ASVspoof 2021), wild internet deepfakes, and our own generated clones. Fusion weights and alert thresholds come from those measured score distributions.</a:t>
             </a:r>
           </a:p>
         </p:txBody>
@@ -9336,7 +9336,7 @@
                 </a:solidFill>
                 <a:latin typeface="Calibri"/>
               </a:rPr>
-              <a:t>Every component earns its fusion weight through validation — detectors that haven't proven themselves on real audio (e.g. our replay module, see roadmap) contribute zero until they do.</a:t>
+              <a:t>Every component earns its fusion weight through validation. The same benchmark retired our original Stage 1 screener (AASIST-L: AUC 0.33 on real audio) and keeps the replay module at zero weight until calibrated.</a:t>
             </a:r>
           </a:p>
         </p:txBody>
@@ -10281,8 +10281,8 @@
         </p:nvSpPr>
         <p:spPr>
           <a:xfrm>
-            <a:off x="685800" y="1920240"/>
-            <a:ext cx="6766560" cy="658368"/>
+            <a:off x="685800" y="1828800"/>
+            <a:ext cx="6766560" cy="603504"/>
           </a:xfrm>
           <a:prstGeom prst="roundRect">
             <a:avLst>
@@ -10327,7 +10327,7 @@
         </p:nvSpPr>
         <p:spPr>
           <a:xfrm>
-            <a:off x="914400" y="2066544"/>
+            <a:off x="914400" y="1947672"/>
             <a:ext cx="6400800" cy="411480"/>
           </a:xfrm>
           <a:prstGeom prst="rect">
@@ -10347,13 +10347,13 @@
               </a:lnSpc>
             </a:pPr>
             <a:r>
-              <a:rPr sz="1400" b="0">
+              <a:rPr sz="1300" b="0">
                 <a:solidFill>
                   <a:srgbClr val="1A1A1A"/>
                 </a:solidFill>
                 <a:latin typeface="Calibri"/>
               </a:rPr>
-              <a:t>Genuine speech (LibriSpeech, male + female)</a:t>
+              <a:t>Detection — 323 fakes: 7 GAN vocoders, 100+ TTS/VC systems, wild deepfakes, ElevenLabs</a:t>
             </a:r>
           </a:p>
         </p:txBody>
@@ -10366,7 +10366,7 @@
         </p:nvSpPr>
         <p:spPr>
           <a:xfrm>
-            <a:off x="7726680" y="2048256"/>
+            <a:off x="7726680" y="1938528"/>
             <a:ext cx="3840480" cy="411480"/>
           </a:xfrm>
           <a:prstGeom prst="rect">
@@ -10388,11 +10388,11 @@
             <a:r>
               <a:rPr sz="1500" b="1">
                 <a:solidFill>
-                  <a:srgbClr val="1B7A43"/>
-                </a:solidFill>
-                <a:latin typeface="Calibri"/>
-              </a:rPr>
-              <a:t>0 false alerts across every chunk</a:t>
+                  <a:srgbClr val="C0392B"/>
+                </a:solidFill>
+                <a:latin typeface="Calibri"/>
+              </a:rPr>
+              <a:t>99% RED ≤ 10 s (≥4 s clips)</a:t>
             </a:r>
           </a:p>
         </p:txBody>
@@ -10405,8 +10405,8 @@
         </p:nvSpPr>
         <p:spPr>
           <a:xfrm>
-            <a:off x="685800" y="2697480"/>
-            <a:ext cx="6766560" cy="658368"/>
+            <a:off x="685800" y="2523744"/>
+            <a:ext cx="6766560" cy="603504"/>
           </a:xfrm>
           <a:prstGeom prst="roundRect">
             <a:avLst>
@@ -10451,7 +10451,7 @@
         </p:nvSpPr>
         <p:spPr>
           <a:xfrm>
-            <a:off x="914400" y="2843784"/>
+            <a:off x="914400" y="2642616"/>
             <a:ext cx="6400800" cy="411480"/>
           </a:xfrm>
           <a:prstGeom prst="rect">
@@ -10471,13 +10471,13 @@
               </a:lnSpc>
             </a:pPr>
             <a:r>
-              <a:rPr sz="1400" b="0">
+              <a:rPr sz="1300" b="0">
                 <a:solidFill>
                   <a:srgbClr val="1A1A1A"/>
                 </a:solidFill>
                 <a:latin typeface="Calibri"/>
               </a:rPr>
-              <a:t>Voice clone — SpeechT5, x-vector cloned speaker</a:t>
+              <a:t>Time to alert (median across detected fakes)</a:t>
             </a:r>
           </a:p>
         </p:txBody>
@@ -10490,7 +10490,7 @@
         </p:nvSpPr>
         <p:spPr>
           <a:xfrm>
-            <a:off x="7726680" y="2825496"/>
+            <a:off x="7726680" y="2633472"/>
             <a:ext cx="3840480" cy="411480"/>
           </a:xfrm>
           <a:prstGeom prst="rect">
@@ -10516,7 +10516,7 @@
                 </a:solidFill>
                 <a:latin typeface="Calibri"/>
               </a:rPr>
-              <a:t>RED in 1.5 s</a:t>
+              <a:t>AMBER 1.5 s · RED 2.0 s</a:t>
             </a:r>
           </a:p>
         </p:txBody>
@@ -10529,8 +10529,8 @@
         </p:nvSpPr>
         <p:spPr>
           <a:xfrm>
-            <a:off x="685800" y="3474720"/>
-            <a:ext cx="6766560" cy="658368"/>
+            <a:off x="685800" y="3218688"/>
+            <a:ext cx="6766560" cy="603504"/>
           </a:xfrm>
           <a:prstGeom prst="roundRect">
             <a:avLst>
@@ -10575,7 +10575,7 @@
         </p:nvSpPr>
         <p:spPr>
           <a:xfrm>
-            <a:off x="914400" y="3621024"/>
+            <a:off x="914400" y="3337560"/>
             <a:ext cx="6400800" cy="411480"/>
           </a:xfrm>
           <a:prstGeom prst="rect">
@@ -10595,13 +10595,13 @@
               </a:lnSpc>
             </a:pPr>
             <a:r>
-              <a:rPr sz="1400" b="0">
+              <a:rPr sz="1300" b="0">
                 <a:solidFill>
                   <a:srgbClr val="1A1A1A"/>
                 </a:solidFill>
                 <a:latin typeface="Calibri"/>
               </a:rPr>
-              <a:t>Voice clone — ElevenLabs (WhatsApp-compressed)</a:t>
+              <a:t>Hindi — FLEURS genuine vs MMS-TTS fakes (multilingual)</a:t>
             </a:r>
           </a:p>
         </p:txBody>
@@ -10614,7 +10614,7 @@
         </p:nvSpPr>
         <p:spPr>
           <a:xfrm>
-            <a:off x="7726680" y="3602736"/>
+            <a:off x="7726680" y="3328416"/>
             <a:ext cx="3840480" cy="411480"/>
           </a:xfrm>
           <a:prstGeom prst="rect">
@@ -10640,7 +10640,7 @@
                 </a:solidFill>
                 <a:latin typeface="Calibri"/>
               </a:rPr>
-              <a:t>AMBER 3.0 s → RED 5.0 s</a:t>
+              <a:t>AUC 1.0 · 100% flagged ≤5 s</a:t>
             </a:r>
           </a:p>
         </p:txBody>
@@ -10653,8 +10653,8 @@
         </p:nvSpPr>
         <p:spPr>
           <a:xfrm>
-            <a:off x="685800" y="4251960"/>
-            <a:ext cx="6766560" cy="658368"/>
+            <a:off x="685800" y="3913632"/>
+            <a:ext cx="6766560" cy="603504"/>
           </a:xfrm>
           <a:prstGeom prst="roundRect">
             <a:avLst>
@@ -10699,7 +10699,7 @@
         </p:nvSpPr>
         <p:spPr>
           <a:xfrm>
-            <a:off x="914400" y="4398264"/>
+            <a:off x="914400" y="4032504"/>
             <a:ext cx="6400800" cy="411480"/>
           </a:xfrm>
           <a:prstGeom prst="rect">
@@ -10719,13 +10719,13 @@
               </a:lnSpc>
             </a:pPr>
             <a:r>
-              <a:rPr sz="1400" b="0">
+              <a:rPr sz="1300" b="0">
                 <a:solidFill>
                   <a:srgbClr val="1A1A1A"/>
                 </a:solidFill>
                 <a:latin typeface="Calibri"/>
               </a:rPr>
-              <a:t>Silence / degraded audio</a:t>
+              <a:t>Genuine speech — 173 clips incl. codec + noisy wild domains</a:t>
             </a:r>
           </a:p>
         </p:txBody>
@@ -10738,7 +10738,7 @@
         </p:nvSpPr>
         <p:spPr>
           <a:xfrm>
-            <a:off x="7726680" y="4379976"/>
+            <a:off x="7726680" y="4023360"/>
             <a:ext cx="3840480" cy="411480"/>
           </a:xfrm>
           <a:prstGeom prst="rect">
@@ -10760,11 +10760,11 @@
             <a:r>
               <a:rPr sz="1500" b="1">
                 <a:solidFill>
-                  <a:srgbClr val="8A8F98"/>
-                </a:solidFill>
-                <a:latin typeface="Calibri"/>
-              </a:rPr>
-              <a:t>GREY — never a false risk claim</a:t>
+                  <a:srgbClr val="1B7A43"/>
+                </a:solidFill>
+                <a:latin typeface="Calibri"/>
+              </a:rPr>
+              <a:t>3.5% false-RED · demo set: zero</a:t>
             </a:r>
           </a:p>
         </p:txBody>
@@ -10777,8 +10777,8 @@
         </p:nvSpPr>
         <p:spPr>
           <a:xfrm>
-            <a:off x="685800" y="5029200"/>
-            <a:ext cx="6766560" cy="658368"/>
+            <a:off x="685800" y="4608576"/>
+            <a:ext cx="6766560" cy="603504"/>
           </a:xfrm>
           <a:prstGeom prst="roundRect">
             <a:avLst>
@@ -10823,7 +10823,7 @@
         </p:nvSpPr>
         <p:spPr>
           <a:xfrm>
-            <a:off x="914400" y="5175504"/>
+            <a:off x="914400" y="4727448"/>
             <a:ext cx="6400800" cy="411480"/>
           </a:xfrm>
           <a:prstGeom prst="rect">
@@ -10843,13 +10843,13 @@
               </a:lnSpc>
             </a:pPr>
             <a:r>
-              <a:rPr sz="1400" b="0">
+              <a:rPr sz="1300" b="0">
                 <a:solidFill>
                   <a:srgbClr val="1A1A1A"/>
                 </a:solidFill>
                 <a:latin typeface="Calibri"/>
               </a:rPr>
-              <a:t>Latency, full ensemble on laptop GPU (RTX 4050)</a:t>
+              <a:t>Silence / degraded audio</a:t>
             </a:r>
           </a:p>
         </p:txBody>
@@ -10862,7 +10862,7 @@
         </p:nvSpPr>
         <p:spPr>
           <a:xfrm>
-            <a:off x="7726680" y="5157216"/>
+            <a:off x="7726680" y="4718304"/>
             <a:ext cx="3840480" cy="411480"/>
           </a:xfrm>
           <a:prstGeom prst="rect">
@@ -10884,24 +10884,148 @@
             <a:r>
               <a:rPr sz="1500" b="1">
                 <a:solidFill>
+                  <a:srgbClr val="8A8F98"/>
+                </a:solidFill>
+                <a:latin typeface="Calibri"/>
+              </a:rPr>
+              <a:t>GREY — never a false risk claim</a:t>
+            </a:r>
+          </a:p>
+        </p:txBody>
+      </p:sp>
+      <p:sp>
+        <p:nvSpPr>
+          <p:cNvPr id="20" name="Rounded Rectangle 19"/>
+          <p:cNvSpPr/>
+          <p:nvPr/>
+        </p:nvSpPr>
+        <p:spPr>
+          <a:xfrm>
+            <a:off x="685800" y="5303520"/>
+            <a:ext cx="6766560" cy="603504"/>
+          </a:xfrm>
+          <a:prstGeom prst="roundRect">
+            <a:avLst>
+              <a:gd name="adj" fmla="val 12000"/>
+            </a:avLst>
+          </a:prstGeom>
+          <a:solidFill>
+            <a:srgbClr val="F2F2F0"/>
+          </a:solidFill>
+          <a:ln>
+            <a:noFill/>
+          </a:ln>
+          <a:effectLst/>
+        </p:spPr>
+        <p:style>
+          <a:lnRef idx="1">
+            <a:schemeClr val="accent1"/>
+          </a:lnRef>
+          <a:fillRef idx="3">
+            <a:schemeClr val="accent1"/>
+          </a:fillRef>
+          <a:effectRef idx="2">
+            <a:schemeClr val="accent1"/>
+          </a:effectRef>
+          <a:fontRef idx="minor">
+            <a:schemeClr val="lt1"/>
+          </a:fontRef>
+        </p:style>
+        <p:txBody>
+          <a:bodyPr rtlCol="0" anchor="ctr"/>
+          <a:lstStyle/>
+          <a:p>
+            <a:pPr algn="ctr"/>
+          </a:p>
+        </p:txBody>
+      </p:sp>
+      <p:sp>
+        <p:nvSpPr>
+          <p:cNvPr id="21" name="TextBox 20"/>
+          <p:cNvSpPr txBox="1"/>
+          <p:nvPr/>
+        </p:nvSpPr>
+        <p:spPr>
+          <a:xfrm>
+            <a:off x="914400" y="5422392"/>
+            <a:ext cx="6400800" cy="411480"/>
+          </a:xfrm>
+          <a:prstGeom prst="rect">
+            <a:avLst/>
+          </a:prstGeom>
+          <a:noFill/>
+        </p:spPr>
+        <p:txBody>
+          <a:bodyPr wrap="square" anchor="t">
+            <a:spAutoFit/>
+          </a:bodyPr>
+          <a:lstStyle/>
+          <a:p>
+            <a:pPr algn="l">
+              <a:lnSpc>
+                <a:spcPct val="100000"/>
+              </a:lnSpc>
+            </a:pPr>
+            <a:r>
+              <a:rPr sz="1300" b="0">
+                <a:solidFill>
                   <a:srgbClr val="1A1A1A"/>
                 </a:solidFill>
                 <a:latin typeface="Calibri"/>
               </a:rPr>
-              <a:t>p95 166 ms  ·  budget 200 ms</a:t>
-            </a:r>
-          </a:p>
-        </p:txBody>
-      </p:sp>
-      <p:sp>
-        <p:nvSpPr>
-          <p:cNvPr id="20" name="TextBox 19"/>
-          <p:cNvSpPr txBox="1"/>
-          <p:nvPr/>
-        </p:nvSpPr>
-        <p:spPr>
-          <a:xfrm>
-            <a:off x="685800" y="5943600"/>
+              <a:t>Latency per 500 ms chunk (60 W laptop GPU)</a:t>
+            </a:r>
+          </a:p>
+        </p:txBody>
+      </p:sp>
+      <p:sp>
+        <p:nvSpPr>
+          <p:cNvPr id="22" name="TextBox 21"/>
+          <p:cNvSpPr txBox="1"/>
+          <p:nvPr/>
+        </p:nvSpPr>
+        <p:spPr>
+          <a:xfrm>
+            <a:off x="7726680" y="5413248"/>
+            <a:ext cx="3840480" cy="411480"/>
+          </a:xfrm>
+          <a:prstGeom prst="rect">
+            <a:avLst/>
+          </a:prstGeom>
+          <a:noFill/>
+        </p:spPr>
+        <p:txBody>
+          <a:bodyPr wrap="square" anchor="t">
+            <a:spAutoFit/>
+          </a:bodyPr>
+          <a:lstStyle/>
+          <a:p>
+            <a:pPr algn="l">
+              <a:lnSpc>
+                <a:spcPct val="100000"/>
+              </a:lnSpc>
+            </a:pPr>
+            <a:r>
+              <a:rPr sz="1500" b="1">
+                <a:solidFill>
+                  <a:srgbClr val="1A1A1A"/>
+                </a:solidFill>
+                <a:latin typeface="Calibri"/>
+              </a:rPr>
+              <a:t>p50 83–113 ms · p95 207 ms</a:t>
+            </a:r>
+          </a:p>
+        </p:txBody>
+      </p:sp>
+      <p:sp>
+        <p:nvSpPr>
+          <p:cNvPr id="23" name="TextBox 22"/>
+          <p:cNvSpPr txBox="1"/>
+          <p:nvPr/>
+        </p:nvSpPr>
+        <p:spPr>
+          <a:xfrm>
+            <a:off x="685800" y="6035040"/>
             <a:ext cx="10820095" cy="548640"/>
           </a:xfrm>
           <a:prstGeom prst="rect">
@@ -10921,20 +11045,20 @@
               </a:lnSpc>
             </a:pPr>
             <a:r>
-              <a:rPr sz="1300" b="0">
+              <a:rPr sz="1200" b="0">
                 <a:solidFill>
                   <a:srgbClr val="6B7280"/>
                 </a:solidFill>
                 <a:latin typeface="Calibri"/>
               </a:rPr>
-              <a:t>Alert budget from the problem statement: flag within the first 10 seconds — we alert at 1.5–5 s. 94 automated tests gate every change, including these acceptance thresholds.</a:t>
-            </a:r>
-          </a:p>
-        </p:txBody>
-      </p:sp>
-      <p:sp>
-        <p:nvSpPr>
-          <p:cNvPr id="21" name="TextBox 20"/>
+              <a:t>Problem statement asks: flag High Risk within the first 10 seconds — median RED is at 1.5 s. Measured on a 496-clip benchmark (WaveFake, ASVspoof 2021 DF, In-the-Wild + generated clones); 94 automated tests gate every change.</a:t>
+            </a:r>
+          </a:p>
+        </p:txBody>
+      </p:sp>
+      <p:sp>
+        <p:nvSpPr>
+          <p:cNvPr id="24" name="TextBox 23"/>
           <p:cNvSpPr txBox="1"/>
           <p:nvPr/>
         </p:nvSpPr>
@@ -10973,7 +11097,7 @@
       </p:sp>
       <p:sp>
         <p:nvSpPr>
-          <p:cNvPr id="22" name="TextBox 21"/>
+          <p:cNvPr id="25" name="TextBox 24"/>
           <p:cNvSpPr txBox="1"/>
           <p:nvPr/>
         </p:nvSpPr>

--- a/docs/presentation/VoiceShield_Jigyasa_UCOPSB.pptx
+++ b/docs/presentation/VoiceShield_Jigyasa_UCOPSB.pptx
@@ -9639,7 +9639,7 @@
                 </a:solidFill>
                 <a:latin typeface="Calibri"/>
               </a:rPr>
-              <a:t>Explainable alerts</a:t>
+              <a:t>Explainable &amp; multilingual</a:t>
             </a:r>
           </a:p>
         </p:txBody>
@@ -9678,7 +9678,7 @@
                 </a:solidFill>
                 <a:latin typeface="Calibri"/>
               </a:rPr>
-              <a:t>Every AMBER/RED names its artifact — “phase discontinuity”, “over-smooth pitch”. Agents act on reasons, not scores.</a:t>
+              <a:t>Every AMBER/RED names its artifact; validated on Hindi as well as English (EER 0%). Agents act on reasons, not black-box scores.</a:t>
             </a:r>
           </a:p>
         </p:txBody>
@@ -9887,7 +9887,7 @@
                 </a:solidFill>
                 <a:latin typeface="Calibri"/>
               </a:rPr>
-              <a:t>Cascade efficiency</a:t>
+              <a:t>Same voice, still human</a:t>
             </a:r>
           </a:p>
         </p:txBody>
@@ -9926,7 +9926,7 @@
                 </a:solidFill>
                 <a:latin typeface="Calibri"/>
               </a:rPr>
-              <a:t>Lightweight screening every chunk; the GPU ensemble spins up only on suspicion. Scales to many concurrent calls per box.</a:t>
+              <a:t>Beyond deepfake detection, ECAPA speaker-tracking flags a mid-call takeover or splice — the human-fraudster case biometrics miss.</a:t>
             </a:r>
           </a:p>
         </p:txBody>
@@ -10281,8 +10281,8 @@
         </p:nvSpPr>
         <p:spPr>
           <a:xfrm>
-            <a:off x="685800" y="1828800"/>
-            <a:ext cx="6766560" cy="603504"/>
+            <a:off x="685800" y="1783080"/>
+            <a:ext cx="6858000" cy="585216"/>
           </a:xfrm>
           <a:prstGeom prst="roundRect">
             <a:avLst>
@@ -10327,8 +10327,8 @@
         </p:nvSpPr>
         <p:spPr>
           <a:xfrm>
-            <a:off x="914400" y="1947672"/>
-            <a:ext cx="6400800" cy="411480"/>
+            <a:off x="914400" y="1892808"/>
+            <a:ext cx="6492240" cy="411480"/>
           </a:xfrm>
           <a:prstGeom prst="rect">
             <a:avLst/>
@@ -10347,13 +10347,13 @@
               </a:lnSpc>
             </a:pPr>
             <a:r>
-              <a:rPr sz="1300" b="0">
+              <a:rPr sz="1200" b="0">
                 <a:solidFill>
                   <a:srgbClr val="1A1A1A"/>
                 </a:solidFill>
                 <a:latin typeface="Calibri"/>
               </a:rPr>
-              <a:t>Detection — 323 fakes: 7 GAN vocoders, 100+ TTS/VC systems, wild deepfakes, ElevenLabs</a:t>
+              <a:t>Detection accuracy — EER (standard anti-spoof metric)</a:t>
             </a:r>
           </a:p>
         </p:txBody>
@@ -10366,8 +10366,8 @@
         </p:nvSpPr>
         <p:spPr>
           <a:xfrm>
-            <a:off x="7726680" y="1938528"/>
-            <a:ext cx="3840480" cy="411480"/>
+            <a:off x="7818120" y="1883664"/>
+            <a:ext cx="3749039" cy="411480"/>
           </a:xfrm>
           <a:prstGeom prst="rect">
             <a:avLst/>
@@ -10392,7 +10392,7 @@
                 </a:solidFill>
                 <a:latin typeface="Calibri"/>
               </a:rPr>
-              <a:t>99% RED ≤ 10 s (≥4 s clips)</a:t>
+              <a:t>3.1%  ·  AUC 0.997</a:t>
             </a:r>
           </a:p>
         </p:txBody>
@@ -10405,8 +10405,8 @@
         </p:nvSpPr>
         <p:spPr>
           <a:xfrm>
-            <a:off x="685800" y="2523744"/>
-            <a:ext cx="6766560" cy="603504"/>
+            <a:off x="685800" y="2441448"/>
+            <a:ext cx="6858000" cy="585216"/>
           </a:xfrm>
           <a:prstGeom prst="roundRect">
             <a:avLst>
@@ -10451,8 +10451,8 @@
         </p:nvSpPr>
         <p:spPr>
           <a:xfrm>
-            <a:off x="914400" y="2642616"/>
-            <a:ext cx="6400800" cy="411480"/>
+            <a:off x="914400" y="2551176"/>
+            <a:ext cx="6492240" cy="411480"/>
           </a:xfrm>
           <a:prstGeom prst="rect">
             <a:avLst/>
@@ -10471,13 +10471,13 @@
               </a:lnSpc>
             </a:pPr>
             <a:r>
-              <a:rPr sz="1300" b="0">
+              <a:rPr sz="1200" b="0">
                 <a:solidFill>
                   <a:srgbClr val="1A1A1A"/>
                 </a:solidFill>
                 <a:latin typeface="Calibri"/>
               </a:rPr>
-              <a:t>Time to alert (median across detected fakes)</a:t>
+              <a:t>Fakes flagged RED ≤ 10 s (323 fakes ≥4 s: GAN, TTS, VC, wild, ElevenLabs)</a:t>
             </a:r>
           </a:p>
         </p:txBody>
@@ -10490,8 +10490,8 @@
         </p:nvSpPr>
         <p:spPr>
           <a:xfrm>
-            <a:off x="7726680" y="2633472"/>
-            <a:ext cx="3840480" cy="411480"/>
+            <a:off x="7818120" y="2542032"/>
+            <a:ext cx="3749039" cy="411480"/>
           </a:xfrm>
           <a:prstGeom prst="rect">
             <a:avLst/>
@@ -10516,7 +10516,7 @@
                 </a:solidFill>
                 <a:latin typeface="Calibri"/>
               </a:rPr>
-              <a:t>AMBER 1.5 s · RED 2.0 s</a:t>
+              <a:t>99%  ·  median RED 2.0 s</a:t>
             </a:r>
           </a:p>
         </p:txBody>
@@ -10529,8 +10529,8 @@
         </p:nvSpPr>
         <p:spPr>
           <a:xfrm>
-            <a:off x="685800" y="3218688"/>
-            <a:ext cx="6766560" cy="603504"/>
+            <a:off x="685800" y="3099816"/>
+            <a:ext cx="6858000" cy="585216"/>
           </a:xfrm>
           <a:prstGeom prst="roundRect">
             <a:avLst>
@@ -10575,8 +10575,8 @@
         </p:nvSpPr>
         <p:spPr>
           <a:xfrm>
-            <a:off x="914400" y="3337560"/>
-            <a:ext cx="6400800" cy="411480"/>
+            <a:off x="914400" y="3209544"/>
+            <a:ext cx="6492240" cy="411480"/>
           </a:xfrm>
           <a:prstGeom prst="rect">
             <a:avLst/>
@@ -10595,13 +10595,13 @@
               </a:lnSpc>
             </a:pPr>
             <a:r>
-              <a:rPr sz="1300" b="0">
+              <a:rPr sz="1200" b="0">
                 <a:solidFill>
                   <a:srgbClr val="1A1A1A"/>
                 </a:solidFill>
                 <a:latin typeface="Calibri"/>
               </a:rPr>
-              <a:t>Hindi — FLEURS genuine vs MMS-TTS fakes (multilingual)</a:t>
+              <a:t>Multilingual — Hindi (FLEURS genuine vs MMS-TTS fakes)</a:t>
             </a:r>
           </a:p>
         </p:txBody>
@@ -10614,8 +10614,8 @@
         </p:nvSpPr>
         <p:spPr>
           <a:xfrm>
-            <a:off x="7726680" y="3328416"/>
-            <a:ext cx="3840480" cy="411480"/>
+            <a:off x="7818120" y="3200400"/>
+            <a:ext cx="3749039" cy="411480"/>
           </a:xfrm>
           <a:prstGeom prst="rect">
             <a:avLst/>
@@ -10640,7 +10640,7 @@
                 </a:solidFill>
                 <a:latin typeface="Calibri"/>
               </a:rPr>
-              <a:t>AUC 1.0 · 100% flagged ≤5 s</a:t>
+              <a:t>EER 0% · 100% flagged ≤5 s</a:t>
             </a:r>
           </a:p>
         </p:txBody>
@@ -10653,8 +10653,8 @@
         </p:nvSpPr>
         <p:spPr>
           <a:xfrm>
-            <a:off x="685800" y="3913632"/>
-            <a:ext cx="6766560" cy="603504"/>
+            <a:off x="685800" y="3758184"/>
+            <a:ext cx="6858000" cy="585216"/>
           </a:xfrm>
           <a:prstGeom prst="roundRect">
             <a:avLst>
@@ -10699,8 +10699,8 @@
         </p:nvSpPr>
         <p:spPr>
           <a:xfrm>
-            <a:off x="914400" y="4032504"/>
-            <a:ext cx="6400800" cy="411480"/>
+            <a:off x="914400" y="3867912"/>
+            <a:ext cx="6492240" cy="411480"/>
           </a:xfrm>
           <a:prstGeom prst="rect">
             <a:avLst/>
@@ -10719,7 +10719,7 @@
               </a:lnSpc>
             </a:pPr>
             <a:r>
-              <a:rPr sz="1300" b="0">
+              <a:rPr sz="1200" b="0">
                 <a:solidFill>
                   <a:srgbClr val="1A1A1A"/>
                 </a:solidFill>
@@ -10738,8 +10738,8 @@
         </p:nvSpPr>
         <p:spPr>
           <a:xfrm>
-            <a:off x="7726680" y="4023360"/>
-            <a:ext cx="3840480" cy="411480"/>
+            <a:off x="7818120" y="3858768"/>
+            <a:ext cx="3749039" cy="411480"/>
           </a:xfrm>
           <a:prstGeom prst="rect">
             <a:avLst/>
@@ -10764,7 +10764,7 @@
                 </a:solidFill>
                 <a:latin typeface="Calibri"/>
               </a:rPr>
-              <a:t>3.5% false-RED · demo set: zero</a:t>
+              <a:t>3.5% false-RED · demo: zero</a:t>
             </a:r>
           </a:p>
         </p:txBody>
@@ -10777,8 +10777,8 @@
         </p:nvSpPr>
         <p:spPr>
           <a:xfrm>
-            <a:off x="685800" y="4608576"/>
-            <a:ext cx="6766560" cy="603504"/>
+            <a:off x="685800" y="4416552"/>
+            <a:ext cx="6858000" cy="585216"/>
           </a:xfrm>
           <a:prstGeom prst="roundRect">
             <a:avLst>
@@ -10823,8 +10823,8 @@
         </p:nvSpPr>
         <p:spPr>
           <a:xfrm>
-            <a:off x="914400" y="4727448"/>
-            <a:ext cx="6400800" cy="411480"/>
+            <a:off x="914400" y="4526280"/>
+            <a:ext cx="6492240" cy="411480"/>
           </a:xfrm>
           <a:prstGeom prst="rect">
             <a:avLst/>
@@ -10843,13 +10843,13 @@
               </a:lnSpc>
             </a:pPr>
             <a:r>
-              <a:rPr sz="1300" b="0">
+              <a:rPr sz="1200" b="0">
                 <a:solidFill>
                   <a:srgbClr val="1A1A1A"/>
                 </a:solidFill>
                 <a:latin typeface="Calibri"/>
               </a:rPr>
-              <a:t>Silence / degraded audio</a:t>
+              <a:t>Precision @ 1% fraud rate — single chunk → 2-chunk hysteresis</a:t>
             </a:r>
           </a:p>
         </p:txBody>
@@ -10862,8 +10862,8 @@
         </p:nvSpPr>
         <p:spPr>
           <a:xfrm>
-            <a:off x="7726680" y="4718304"/>
-            <a:ext cx="3840480" cy="411480"/>
+            <a:off x="7818120" y="4517136"/>
+            <a:ext cx="3749039" cy="411480"/>
           </a:xfrm>
           <a:prstGeom prst="rect">
             <a:avLst/>
@@ -10884,11 +10884,11 @@
             <a:r>
               <a:rPr sz="1500" b="1">
                 <a:solidFill>
-                  <a:srgbClr val="8A8F98"/>
-                </a:solidFill>
-                <a:latin typeface="Calibri"/>
-              </a:rPr>
-              <a:t>GREY — never a false risk claim</a:t>
+                  <a:srgbClr val="1A1A1A"/>
+                </a:solidFill>
+                <a:latin typeface="Calibri"/>
+              </a:rPr>
+              <a:t>18% → 82%</a:t>
             </a:r>
           </a:p>
         </p:txBody>
@@ -10901,8 +10901,8 @@
         </p:nvSpPr>
         <p:spPr>
           <a:xfrm>
-            <a:off x="685800" y="5303520"/>
-            <a:ext cx="6766560" cy="603504"/>
+            <a:off x="685800" y="5074920"/>
+            <a:ext cx="6858000" cy="585216"/>
           </a:xfrm>
           <a:prstGeom prst="roundRect">
             <a:avLst>
@@ -10947,8 +10947,8 @@
         </p:nvSpPr>
         <p:spPr>
           <a:xfrm>
-            <a:off x="914400" y="5422392"/>
-            <a:ext cx="6400800" cy="411480"/>
+            <a:off x="914400" y="5184648"/>
+            <a:ext cx="6492240" cy="411480"/>
           </a:xfrm>
           <a:prstGeom prst="rect">
             <a:avLst/>
@@ -10967,13 +10967,13 @@
               </a:lnSpc>
             </a:pPr>
             <a:r>
-              <a:rPr sz="1300" b="0">
+              <a:rPr sz="1200" b="0">
                 <a:solidFill>
                   <a:srgbClr val="1A1A1A"/>
                 </a:solidFill>
                 <a:latin typeface="Calibri"/>
               </a:rPr>
-              <a:t>Latency per 500 ms chunk (60 W laptop GPU)</a:t>
+              <a:t>Latency per 500 ms chunk (60 W laptop GPU, cascade)</a:t>
             </a:r>
           </a:p>
         </p:txBody>
@@ -10986,8 +10986,8 @@
         </p:nvSpPr>
         <p:spPr>
           <a:xfrm>
-            <a:off x="7726680" y="5413248"/>
-            <a:ext cx="3840480" cy="411480"/>
+            <a:off x="7818120" y="5175504"/>
+            <a:ext cx="3749039" cy="411480"/>
           </a:xfrm>
           <a:prstGeom prst="rect">
             <a:avLst/>
@@ -11012,7 +11012,7 @@
                 </a:solidFill>
                 <a:latin typeface="Calibri"/>
               </a:rPr>
-              <a:t>p50 83–113 ms · p95 207 ms</a:t>
+              <a:t>p50 126 ms · p95 185 ms</a:t>
             </a:r>
           </a:p>
         </p:txBody>
@@ -11025,8 +11025,8 @@
         </p:nvSpPr>
         <p:spPr>
           <a:xfrm>
-            <a:off x="685800" y="6035040"/>
-            <a:ext cx="10820095" cy="548640"/>
+            <a:off x="685800" y="5806440"/>
+            <a:ext cx="10820095" cy="731520"/>
           </a:xfrm>
           <a:prstGeom prst="rect">
             <a:avLst/>
@@ -11041,7 +11041,7 @@
           <a:p>
             <a:pPr algn="l">
               <a:lnSpc>
-                <a:spcPct val="100000"/>
+                <a:spcPct val="110000"/>
               </a:lnSpc>
             </a:pPr>
             <a:r>
@@ -11051,7 +11051,7 @@
                 </a:solidFill>
                 <a:latin typeface="Calibri"/>
               </a:rPr>
-              <a:t>Problem statement asks: flag High Risk within the first 10 seconds — median RED is at 1.5 s. Measured on a 496-clip benchmark (WaveFake, ASVspoof 2021 DF, In-the-Wild + generated clones); 94 automated tests gate every change.</a:t>
+              <a:t>Problem statement asks: flag within the first 10 seconds — median RED is 2.0 s. Benchmarked on 496 clips (WaveFake, ASVspoof 2021 DF, In-the-Wild + generated clones). We report EER, not just AUC — and at a realistic 1% fraud rate the 2-chunk hysteresis rule is what lifts alert precision from 18% to 82%.</a:t>
             </a:r>
           </a:p>
         </p:txBody>
@@ -11320,7 +11320,7 @@
                 </a:solidFill>
                 <a:latin typeface="Calibri"/>
               </a:rPr>
-              <a:t>  We measured each model's per-domain failure modes (a top model scores 1.0 on everything; another false-fires on 10% of genuine speakers) and encoded that trust into per-model peak-evidence rights. Plug-and-play ensembles don't survive contact with real audio — ours did.</a:t>
+              <a:t>  We benchmarked 8 detectors on 496 clips and encoded each model's measured failure modes into per-model peak-evidence rights — even retiring our first screener (AASIST, AUC 0.33 on real audio). Plug-and-play ensembles don't survive contact with real audio; ours was rebuilt to.</a:t>
             </a:r>
           </a:p>
           <a:p>
@@ -11339,7 +11339,7 @@
                 </a:solidFill>
                 <a:latin typeface="Calibri"/>
               </a:rPr>
-              <a:t>—  Weak-evidence discipline.</a:t>
+              <a:t>—  Honest metrics.</a:t>
             </a:r>
             <a:r>
               <a:rPr sz="1500">
@@ -11348,7 +11348,7 @@
                 </a:solidFill>
                 <a:latin typeface="Calibri"/>
               </a:rPr>
-              <a:t>  Scores scale with voiced content; silence can never escalate risk; GREY overrides everything. Zero false alerts on genuine speakers is an engineered property, not luck.</a:t>
+              <a:t>  We report EER (3.1%) and precision at a realistic 1% fraud rate, not just a flattering AUC. That analysis is why the pipeline uses 2-chunk hysteresis — it lifts alert precision from 18% to 82%.</a:t>
             </a:r>
           </a:p>
           <a:p>
@@ -11367,7 +11367,7 @@
                 </a:solidFill>
                 <a:latin typeface="Calibri"/>
               </a:rPr>
-              <a:t>—  Channel forensics.</a:t>
+              <a:t>—  Robustness engineered, not assumed.</a:t>
             </a:r>
             <a:r>
               <a:rPr sz="1500">
@@ -11376,7 +11376,7 @@
                 </a:solidFill>
                 <a:latin typeface="Calibri"/>
               </a:rPr>
-              <a:t>  We quantified how re-recording destroys synthesis artifacts (0.91 → 0.10 through a loudspeaker) — a measured limitation most vendors won't tell you about, and the reason replay-channel detection is our top calibration priority for the pilot.</a:t>
+              <a:t>  Neural VAD holds in noise where energy gating calls pure noise 'speech'; scores scale with voiced content; GREY overrides everything. Measured, with the noise limit (AUC 0.81 at 15 dB) documented rather than hidden.</a:t>
             </a:r>
           </a:p>
           <a:p>
@@ -11404,7 +11404,7 @@
                 </a:solidFill>
                 <a:latin typeface="Calibri"/>
               </a:rPr>
-              <a:t>  Fixture pipeline (genuine / TTS / cloned / degraded), 94 automated tests, latency benchmarks — new detectors are trusted only as far as they prove. Our own replay module is implemented but quarantined at zero weight until real call audio validates it. That discipline is the moat.</a:t>
+              <a:t>  Fixture pipeline (English + Hindi, GAN/TTS/VC/wild), 94 automated tests, latency + timing benchmarks — new detectors are trusted only as far as they prove. Replay and watermark modules ship but stay out of the verdict until real call data validates them. That is the moat.</a:t>
             </a:r>
           </a:p>
         </p:txBody>

--- a/docs/presentation/VoiceShield_Jigyasa_UCOPSB.pptx
+++ b/docs/presentation/VoiceShield_Jigyasa_UCOPSB.pptx
@@ -4937,7 +4937,7 @@
                 </a:solidFill>
                 <a:latin typeface="Calibri"/>
               </a:rPr>
-              <a:t>cascade ensemble · replay detection ·</a:t>
+              <a:t>cascade ensemble · multilingual · evidence</a:t>
             </a:r>
           </a:p>
           <a:p>
@@ -4953,7 +4953,7 @@
                 </a:solidFill>
                 <a:latin typeface="Calibri"/>
               </a:rPr>
-              <a:t>evidence export · live dashboard</a:t>
+              <a:t>export · live dashboard</a:t>
             </a:r>
           </a:p>
         </p:txBody>
@@ -5114,7 +5114,7 @@
                 </a:solidFill>
                 <a:latin typeface="Calibri"/>
               </a:rPr>
-              <a:t>SIP/RTP tap on live traffic · replay-channel</a:t>
+              <a:t>SIP/RTP tap on live traffic · replay via</a:t>
             </a:r>
           </a:p>
           <a:p>
@@ -5130,7 +5130,7 @@
                 </a:solidFill>
                 <a:latin typeface="Calibri"/>
               </a:rPr>
-              <a:t>detection calibrated on real call audio</a:t>
+              <a:t>challenge-response + replay-aware training</a:t>
             </a:r>
           </a:p>
         </p:txBody>
@@ -9336,7 +9336,7 @@
                 </a:solidFill>
                 <a:latin typeface="Calibri"/>
               </a:rPr>
-              <a:t>Every component earns its fusion weight through validation. The same benchmark retired our original Stage 1 screener (AASIST-L: AUC 0.33 on real audio) and keeps the replay module at zero weight until calibrated.</a:t>
+              <a:t>Every component earns its fusion weight through validation — the same benchmark retired our original Stage 1 screener (AASIST-L: AUC 0.33 on real audio) and holds replay at zero weight (open problem, see roadmap).</a:t>
             </a:r>
           </a:p>
         </p:txBody>
@@ -11395,7 +11395,7 @@
                 </a:solidFill>
                 <a:latin typeface="Calibri"/>
               </a:rPr>
-              <a:t>—  A validation harness as the product.</a:t>
+              <a:t>—  We measured what doesn't work, too.</a:t>
             </a:r>
             <a:r>
               <a:rPr sz="1500">
@@ -11404,7 +11404,7 @@
                 </a:solidFill>
                 <a:latin typeface="Calibri"/>
               </a:rPr>
-              <a:t>  Fixture pipeline (English + Hindi, GAN/TTS/VC/wild), 94 automated tests, latency + timing benchmarks — new detectors are trusted only as far as they prove. Replay and watermark modules ship but stay out of the verdict until real call data validates them. That is the moat.</a:t>
+              <a:t>  Replay detection: we built 4 detectors and collected real loudspeaker recordings; none generalized to an unseen channel (AUC 0.19–0.72), reproducing the published state of the art (cross-channel EER 27–46%; passive replay is an open problem). So we hold it out of the verdict rather than false-flag genuine callers — see docs/REPLAY_FINDINGS.md.</a:t>
             </a:r>
           </a:p>
         </p:txBody>

--- a/docs/presentation/VoiceShield_Jigyasa_UCOPSB.pptx
+++ b/docs/presentation/VoiceShield_Jigyasa_UCOPSB.pptx
@@ -11395,7 +11395,7 @@
                 </a:solidFill>
                 <a:latin typeface="Calibri"/>
               </a:rPr>
-              <a:t>—  We measured what doesn't work, too.</a:t>
+              <a:t>—  We solved the hard one honestly.</a:t>
             </a:r>
             <a:r>
               <a:rPr sz="1500">
@@ -11404,7 +11404,7 @@
                 </a:solidFill>
                 <a:latin typeface="Calibri"/>
               </a:rPr>
-              <a:t>  Replay detection: we built 4 detectors and collected real loudspeaker recordings; none generalized to an unseen channel (AUC 0.19–0.72), reproducing the published state of the art (cross-channel EER 27–46%; passive replay is an open problem). So we hold it out of the verdict rather than false-flag genuine callers — see docs/REPLAY_FINDINGS.md.</a:t>
+              <a:t>  Replay: five approaches reproduced the literature's channel wall (AUC 0.19–0.87) — then LoRA-fine-tuning wav2vec2 on a real replay corpus (EchoFake) with channel augmentation cracked the wideband case: cross-channel AUC 0.97 on recordings the model never trained on. Shipped at a verify-don't-block weight; narrowband telephony stays honest pilot work. Synthesis detection is telephony-robust (NII 0.93 through G.711/AMR/G.722). Every number measured on real audio — see docs/REPLAY_FINDINGS.md.</a:t>
             </a:r>
           </a:p>
         </p:txBody>
